--- a/QGIS PowerPoint/GIS and Software Programming.pptx
+++ b/QGIS PowerPoint/GIS and Software Programming.pptx
@@ -134,7 +134,7 @@
 <file path=ppt/revisionInfo.xml><?xml version="1.0" encoding="utf-8"?>
 <p1510:revInfo xmlns:a="http://schemas.openxmlformats.org/drawingml/2006/main" xmlns:r="http://schemas.openxmlformats.org/officeDocument/2006/relationships" xmlns:p1510="http://schemas.microsoft.com/office/powerpoint/2015/10/main">
   <p1510:revLst>
-    <p1510:client id="{8A90FAD1-65DE-46FE-B2B1-E601C5AB8DFD}" v="8" dt="2026-02-03T07:31:53.600"/>
+    <p1510:client id="{8A90FAD1-65DE-46FE-B2B1-E601C5AB8DFD}" v="9" dt="2026-02-03T07:43:04.471"/>
     <p1510:client id="{E76B7A67-BB6B-46AB-BC06-61D11FC138C7}" v="50" dt="2026-02-03T06:34:53.852"/>
   </p1510:revLst>
 </p1510:revInfo>
@@ -145,7 +145,7 @@
   <pc:docChgLst>
     <pc:chgData name="Gary Yu" userId="ff89ab59bb266fda" providerId="LiveId" clId="{6C9262DC-E384-4535-9D53-B347867870A8}"/>
     <pc:docChg chg="undo redo custSel addSld delSld modSld sldOrd">
-      <pc:chgData name="Gary Yu" userId="ff89ab59bb266fda" providerId="LiveId" clId="{6C9262DC-E384-4535-9D53-B347867870A8}" dt="2026-02-03T07:33:23.215" v="4719" actId="20577"/>
+      <pc:chgData name="Gary Yu" userId="ff89ab59bb266fda" providerId="LiveId" clId="{6C9262DC-E384-4535-9D53-B347867870A8}" dt="2026-02-03T07:43:11.301" v="4748" actId="5793"/>
       <pc:docMkLst>
         <pc:docMk/>
       </pc:docMkLst>
@@ -433,14 +433,6 @@
             <pc:docMk/>
             <pc:sldMk cId="1025958060" sldId="264"/>
             <ac:spMk id="2" creationId="{8AD949A7-740F-CAAD-B91E-A654434FBA46}"/>
-          </ac:spMkLst>
-        </pc:spChg>
-        <pc:spChg chg="mod">
-          <ac:chgData name="Gary Yu" userId="ff89ab59bb266fda" providerId="LiveId" clId="{6C9262DC-E384-4535-9D53-B347867870A8}" dt="2026-01-23T03:55:51.908" v="2235"/>
-          <ac:spMkLst>
-            <pc:docMk/>
-            <pc:sldMk cId="1025958060" sldId="264"/>
-            <ac:spMk id="3" creationId="{8BB27450-0915-A448-8EC7-DAA46C7BFB5F}"/>
           </ac:spMkLst>
         </pc:spChg>
       </pc:sldChg>
@@ -899,7 +891,7 @@
         </pc:sldMkLst>
       </pc:sldChg>
       <pc:sldChg chg="addSp modSp new mod">
-        <pc:chgData name="Gary Yu" userId="ff89ab59bb266fda" providerId="LiveId" clId="{6C9262DC-E384-4535-9D53-B347867870A8}" dt="2026-02-03T05:43:08.308" v="2999" actId="20577"/>
+        <pc:chgData name="Gary Yu" userId="ff89ab59bb266fda" providerId="LiveId" clId="{6C9262DC-E384-4535-9D53-B347867870A8}" dt="2026-02-03T07:43:11.301" v="4748" actId="5793"/>
         <pc:sldMkLst>
           <pc:docMk/>
           <pc:sldMk cId="1928736779" sldId="299"/>
@@ -913,7 +905,7 @@
           </ac:spMkLst>
         </pc:spChg>
         <pc:spChg chg="mod">
-          <ac:chgData name="Gary Yu" userId="ff89ab59bb266fda" providerId="LiveId" clId="{6C9262DC-E384-4535-9D53-B347867870A8}" dt="2026-02-03T05:43:08.308" v="2999" actId="20577"/>
+          <ac:chgData name="Gary Yu" userId="ff89ab59bb266fda" providerId="LiveId" clId="{6C9262DC-E384-4535-9D53-B347867870A8}" dt="2026-02-03T07:43:11.301" v="4748" actId="5793"/>
           <ac:spMkLst>
             <pc:docMk/>
             <pc:sldMk cId="1928736779" sldId="299"/>
@@ -937,7 +929,7 @@
         </pc:sldMkLst>
       </pc:sldChg>
       <pc:sldChg chg="addSp delSp modSp new mod ord">
-        <pc:chgData name="Gary Yu" userId="ff89ab59bb266fda" providerId="LiveId" clId="{6C9262DC-E384-4535-9D53-B347867870A8}" dt="2026-02-03T05:51:44.733" v="3088"/>
+        <pc:chgData name="Gary Yu" userId="ff89ab59bb266fda" providerId="LiveId" clId="{6C9262DC-E384-4535-9D53-B347867870A8}" dt="2026-02-03T07:41:41.983" v="4728" actId="1076"/>
         <pc:sldMkLst>
           <pc:docMk/>
           <pc:sldMk cId="2831958241" sldId="301"/>
@@ -966,6 +958,22 @@
             <ac:spMk id="3" creationId="{CEE7EE55-D9F8-C7BC-CFC3-FD8CCFFBA05A}"/>
           </ac:spMkLst>
         </pc:spChg>
+        <pc:spChg chg="add mod">
+          <ac:chgData name="Gary Yu" userId="ff89ab59bb266fda" providerId="LiveId" clId="{6C9262DC-E384-4535-9D53-B347867870A8}" dt="2026-02-03T07:40:31.002" v="4725" actId="1076"/>
+          <ac:spMkLst>
+            <pc:docMk/>
+            <pc:sldMk cId="2831958241" sldId="301"/>
+            <ac:spMk id="4" creationId="{A817F824-2B8A-9E61-39F6-BF7BB7584C3B}"/>
+          </ac:spMkLst>
+        </pc:spChg>
+        <pc:picChg chg="add mod">
+          <ac:chgData name="Gary Yu" userId="ff89ab59bb266fda" providerId="LiveId" clId="{6C9262DC-E384-4535-9D53-B347867870A8}" dt="2026-02-03T07:41:41.983" v="4728" actId="1076"/>
+          <ac:picMkLst>
+            <pc:docMk/>
+            <pc:sldMk cId="2831958241" sldId="301"/>
+            <ac:picMk id="6" creationId="{711731E8-BFB3-5A94-2D6B-3F67FB3249FC}"/>
+          </ac:picMkLst>
+        </pc:picChg>
       </pc:sldChg>
       <pc:sldChg chg="modSp new add del mod">
         <pc:chgData name="Gary Yu" userId="ff89ab59bb266fda" providerId="LiveId" clId="{6C9262DC-E384-4535-9D53-B347867870A8}" dt="2026-02-03T07:32:59.971" v="4713" actId="2696"/>
@@ -8488,6 +8496,71 @@
           </a:p>
         </p:txBody>
       </p:sp>
+      <p:sp>
+        <p:nvSpPr>
+          <p:cNvPr id="4" name="TextBox 3">
+            <a:extLst>
+              <a:ext uri="{FF2B5EF4-FFF2-40B4-BE49-F238E27FC236}">
+                <a16:creationId xmlns:a16="http://schemas.microsoft.com/office/drawing/2014/main" id="{A817F824-2B8A-9E61-39F6-BF7BB7584C3B}"/>
+              </a:ext>
+            </a:extLst>
+          </p:cNvPr>
+          <p:cNvSpPr txBox="1"/>
+          <p:nvPr/>
+        </p:nvSpPr>
+        <p:spPr>
+          <a:xfrm>
+            <a:off x="589935" y="1898926"/>
+            <a:ext cx="11946193" cy="369332"/>
+          </a:xfrm>
+          <a:prstGeom prst="rect">
+            <a:avLst/>
+          </a:prstGeom>
+          <a:noFill/>
+        </p:spPr>
+        <p:txBody>
+          <a:bodyPr wrap="square">
+            <a:spAutoFit/>
+          </a:bodyPr>
+          <a:lstStyle/>
+          <a:p>
+            <a:r>
+              <a:rPr lang="en-US" dirty="0"/>
+              <a:t>https://github.com/Yu2413/Python-Powerhouse-Diverse-Applications-and-Solutions/tree/main/QGIS%20PowerPoint</a:t>
+            </a:r>
+          </a:p>
+        </p:txBody>
+      </p:sp>
+      <p:pic>
+        <p:nvPicPr>
+          <p:cNvPr id="6" name="Picture 5">
+            <a:extLst>
+              <a:ext uri="{FF2B5EF4-FFF2-40B4-BE49-F238E27FC236}">
+                <a16:creationId xmlns:a16="http://schemas.microsoft.com/office/drawing/2014/main" id="{711731E8-BFB3-5A94-2D6B-3F67FB3249FC}"/>
+              </a:ext>
+            </a:extLst>
+          </p:cNvPr>
+          <p:cNvPicPr>
+            <a:picLocks noChangeAspect="1"/>
+          </p:cNvPicPr>
+          <p:nvPr/>
+        </p:nvPicPr>
+        <p:blipFill>
+          <a:blip r:embed="rId2"/>
+          <a:stretch>
+            <a:fillRect/>
+          </a:stretch>
+        </p:blipFill>
+        <p:spPr>
+          <a:xfrm>
+            <a:off x="4853755" y="2429824"/>
+            <a:ext cx="3029257" cy="3029257"/>
+          </a:xfrm>
+          <a:prstGeom prst="rect">
+            <a:avLst/>
+          </a:prstGeom>
+        </p:spPr>
+      </p:pic>
     </p:spTree>
     <p:extLst>
       <p:ext uri="{BB962C8B-B14F-4D97-AF65-F5344CB8AC3E}">
@@ -9481,6 +9554,12 @@
               <a:rPr lang="en-US" dirty="0"/>
               <a:t>.</a:t>
             </a:r>
+          </a:p>
+          <a:p>
+            <a:pPr marL="0" indent="0">
+              <a:buNone/>
+            </a:pPr>
+            <a:endParaRPr lang="en-US" dirty="0"/>
           </a:p>
           <a:p>
             <a:endParaRPr lang="en-US" dirty="0"/>

--- a/QGIS PowerPoint/GIS and Software Programming.pptx
+++ b/QGIS PowerPoint/GIS and Software Programming.pptx
@@ -5,7 +5,7 @@
     <p:sldMasterId id="2147483660" r:id="rId1"/>
   </p:sldMasterIdLst>
   <p:notesMasterIdLst>
-    <p:notesMasterId r:id="rId19"/>
+    <p:notesMasterId r:id="rId21"/>
   </p:notesMasterIdLst>
   <p:sldIdLst>
     <p:sldId id="301" r:id="rId2"/>
@@ -17,14 +17,16 @@
     <p:sldId id="261" r:id="rId8"/>
     <p:sldId id="262" r:id="rId9"/>
     <p:sldId id="263" r:id="rId10"/>
-    <p:sldId id="265" r:id="rId11"/>
-    <p:sldId id="311" r:id="rId12"/>
-    <p:sldId id="266" r:id="rId13"/>
-    <p:sldId id="267" r:id="rId14"/>
-    <p:sldId id="268" r:id="rId15"/>
-    <p:sldId id="269" r:id="rId16"/>
-    <p:sldId id="270" r:id="rId17"/>
-    <p:sldId id="299" r:id="rId18"/>
+    <p:sldId id="313" r:id="rId11"/>
+    <p:sldId id="265" r:id="rId12"/>
+    <p:sldId id="311" r:id="rId13"/>
+    <p:sldId id="266" r:id="rId14"/>
+    <p:sldId id="267" r:id="rId15"/>
+    <p:sldId id="268" r:id="rId16"/>
+    <p:sldId id="269" r:id="rId17"/>
+    <p:sldId id="270" r:id="rId18"/>
+    <p:sldId id="299" r:id="rId19"/>
+    <p:sldId id="312" r:id="rId20"/>
   </p:sldIdLst>
   <p:sldSz cx="12192000" cy="6858000"/>
   <p:notesSz cx="6858000" cy="9144000"/>
@@ -134,7 +136,7 @@
 <file path=ppt/revisionInfo.xml><?xml version="1.0" encoding="utf-8"?>
 <p1510:revInfo xmlns:a="http://schemas.openxmlformats.org/drawingml/2006/main" xmlns:r="http://schemas.openxmlformats.org/officeDocument/2006/relationships" xmlns:p1510="http://schemas.microsoft.com/office/powerpoint/2015/10/main">
   <p1510:revLst>
-    <p1510:client id="{8A90FAD1-65DE-46FE-B2B1-E601C5AB8DFD}" v="9" dt="2026-02-03T07:43:04.471"/>
+    <p1510:client id="{8A90FAD1-65DE-46FE-B2B1-E601C5AB8DFD}" v="18" dt="2026-02-04T04:23:14.041"/>
     <p1510:client id="{E76B7A67-BB6B-46AB-BC06-61D11FC138C7}" v="50" dt="2026-02-03T06:34:53.852"/>
   </p1510:revLst>
 </p1510:revInfo>
@@ -145,7 +147,7 @@
   <pc:docChgLst>
     <pc:chgData name="Gary Yu" userId="ff89ab59bb266fda" providerId="LiveId" clId="{6C9262DC-E384-4535-9D53-B347867870A8}"/>
     <pc:docChg chg="undo redo custSel addSld delSld modSld sldOrd">
-      <pc:chgData name="Gary Yu" userId="ff89ab59bb266fda" providerId="LiveId" clId="{6C9262DC-E384-4535-9D53-B347867870A8}" dt="2026-02-03T07:43:11.301" v="4748" actId="5793"/>
+      <pc:chgData name="Gary Yu" userId="ff89ab59bb266fda" providerId="LiveId" clId="{6C9262DC-E384-4535-9D53-B347867870A8}" dt="2026-02-04T04:23:51.357" v="4918" actId="20577"/>
       <pc:docMkLst>
         <pc:docMk/>
       </pc:docMkLst>
@@ -891,13 +893,13 @@
         </pc:sldMkLst>
       </pc:sldChg>
       <pc:sldChg chg="addSp modSp new mod">
-        <pc:chgData name="Gary Yu" userId="ff89ab59bb266fda" providerId="LiveId" clId="{6C9262DC-E384-4535-9D53-B347867870A8}" dt="2026-02-03T07:43:11.301" v="4748" actId="5793"/>
+        <pc:chgData name="Gary Yu" userId="ff89ab59bb266fda" providerId="LiveId" clId="{6C9262DC-E384-4535-9D53-B347867870A8}" dt="2026-02-04T04:21:22.656" v="4843"/>
         <pc:sldMkLst>
           <pc:docMk/>
           <pc:sldMk cId="1928736779" sldId="299"/>
         </pc:sldMkLst>
         <pc:spChg chg="mod">
-          <ac:chgData name="Gary Yu" userId="ff89ab59bb266fda" providerId="LiveId" clId="{6C9262DC-E384-4535-9D53-B347867870A8}" dt="2026-01-23T03:55:51.908" v="2235"/>
+          <ac:chgData name="Gary Yu" userId="ff89ab59bb266fda" providerId="LiveId" clId="{6C9262DC-E384-4535-9D53-B347867870A8}" dt="2026-02-03T15:33:07.128" v="4759" actId="20577"/>
           <ac:spMkLst>
             <pc:docMk/>
             <pc:sldMk cId="1928736779" sldId="299"/>
@@ -905,7 +907,7 @@
           </ac:spMkLst>
         </pc:spChg>
         <pc:spChg chg="mod">
-          <ac:chgData name="Gary Yu" userId="ff89ab59bb266fda" providerId="LiveId" clId="{6C9262DC-E384-4535-9D53-B347867870A8}" dt="2026-02-03T07:43:11.301" v="4748" actId="5793"/>
+          <ac:chgData name="Gary Yu" userId="ff89ab59bb266fda" providerId="LiveId" clId="{6C9262DC-E384-4535-9D53-B347867870A8}" dt="2026-02-04T04:21:22.656" v="4843"/>
           <ac:spMkLst>
             <pc:docMk/>
             <pc:sldMk cId="1928736779" sldId="299"/>
@@ -1157,12 +1159,67 @@
           </ac:picMkLst>
         </pc:picChg>
       </pc:sldChg>
+      <pc:sldChg chg="addSp delSp modSp mod">
+        <pc:chgData name="Gary Yu" userId="ff89ab59bb266fda" providerId="LiveId" clId="{6C9262DC-E384-4535-9D53-B347867870A8}" dt="2026-02-04T04:23:51.357" v="4918" actId="20577"/>
+        <pc:sldMkLst>
+          <pc:docMk/>
+          <pc:sldMk cId="4225163162" sldId="313"/>
+        </pc:sldMkLst>
+        <pc:spChg chg="mod">
+          <ac:chgData name="Gary Yu" userId="ff89ab59bb266fda" providerId="LiveId" clId="{6C9262DC-E384-4535-9D53-B347867870A8}" dt="2026-02-04T04:21:57.693" v="4859" actId="403"/>
+          <ac:spMkLst>
+            <pc:docMk/>
+            <pc:sldMk cId="4225163162" sldId="313"/>
+            <ac:spMk id="2" creationId="{08595AE9-42C9-8BA7-40AF-204E1F9775B3}"/>
+          </ac:spMkLst>
+        </pc:spChg>
+        <pc:spChg chg="mod">
+          <ac:chgData name="Gary Yu" userId="ff89ab59bb266fda" providerId="LiveId" clId="{6C9262DC-E384-4535-9D53-B347867870A8}" dt="2026-02-04T04:23:51.357" v="4918" actId="20577"/>
+          <ac:spMkLst>
+            <pc:docMk/>
+            <pc:sldMk cId="4225163162" sldId="313"/>
+            <ac:spMk id="3" creationId="{04A86A2F-17FF-282B-3369-090DF3502244}"/>
+          </ac:spMkLst>
+        </pc:spChg>
+        <pc:spChg chg="add">
+          <ac:chgData name="Gary Yu" userId="ff89ab59bb266fda" providerId="LiveId" clId="{6C9262DC-E384-4535-9D53-B347867870A8}" dt="2026-02-04T04:21:39.113" v="4844"/>
+          <ac:spMkLst>
+            <pc:docMk/>
+            <pc:sldMk cId="4225163162" sldId="313"/>
+            <ac:spMk id="4" creationId="{D58EE6CA-1960-553F-5BB9-1609B1ADD83F}"/>
+          </ac:spMkLst>
+        </pc:spChg>
+        <pc:spChg chg="add mod">
+          <ac:chgData name="Gary Yu" userId="ff89ab59bb266fda" providerId="LiveId" clId="{6C9262DC-E384-4535-9D53-B347867870A8}" dt="2026-02-04T04:21:42.814" v="4846"/>
+          <ac:spMkLst>
+            <pc:docMk/>
+            <pc:sldMk cId="4225163162" sldId="313"/>
+            <ac:spMk id="5" creationId="{FB24B75A-91C0-9E3F-25CE-B689A84B627C}"/>
+          </ac:spMkLst>
+        </pc:spChg>
+        <pc:picChg chg="add del mod">
+          <ac:chgData name="Gary Yu" userId="ff89ab59bb266fda" providerId="LiveId" clId="{6C9262DC-E384-4535-9D53-B347867870A8}" dt="2026-02-04T04:23:01.062" v="4865" actId="478"/>
+          <ac:picMkLst>
+            <pc:docMk/>
+            <pc:sldMk cId="4225163162" sldId="313"/>
+            <ac:picMk id="7" creationId="{92E22B04-4179-5586-E120-B8C4BA171B23}"/>
+          </ac:picMkLst>
+        </pc:picChg>
+        <pc:picChg chg="add del">
+          <ac:chgData name="Gary Yu" userId="ff89ab59bb266fda" providerId="LiveId" clId="{6C9262DC-E384-4535-9D53-B347867870A8}" dt="2026-02-04T04:23:09.549" v="4868" actId="478"/>
+          <ac:picMkLst>
+            <pc:docMk/>
+            <pc:sldMk cId="4225163162" sldId="313"/>
+            <ac:picMk id="9" creationId="{C3B8B389-93DB-35A1-A068-18FA895D7E2B}"/>
+          </ac:picMkLst>
+        </pc:picChg>
+      </pc:sldChg>
     </pc:docChg>
   </pc:docChgLst>
   <pc:docChgLst>
     <pc:chgData name="Gary Yu" userId="ff89ab59bb266fda" providerId="LiveId" clId="{D6D08EAD-FF1A-43AE-B251-67B60A84CA0E}"/>
     <pc:docChg chg="undo custSel addSld delSld modSld">
-      <pc:chgData name="Gary Yu" userId="ff89ab59bb266fda" providerId="LiveId" clId="{D6D08EAD-FF1A-43AE-B251-67B60A84CA0E}" dt="2026-01-30T06:06:47.627" v="2059" actId="255"/>
+      <pc:chgData name="Gary Yu" userId="ff89ab59bb266fda" providerId="LiveId" clId="{D6D08EAD-FF1A-43AE-B251-67B60A84CA0E}" dt="2026-02-04T01:27:45.460" v="2068" actId="20577"/>
       <pc:docMkLst>
         <pc:docMk/>
       </pc:docMkLst>
@@ -1300,6 +1357,21 @@
             <pc:docMk/>
             <pc:sldMk cId="1928736779" sldId="299"/>
             <ac:spMk id="3" creationId="{6D486C65-8304-5890-C619-183A71590293}"/>
+          </ac:spMkLst>
+        </pc:spChg>
+      </pc:sldChg>
+      <pc:sldChg chg="modSp new mod">
+        <pc:chgData name="Gary Yu" userId="ff89ab59bb266fda" providerId="LiveId" clId="{D6D08EAD-FF1A-43AE-B251-67B60A84CA0E}" dt="2026-02-04T01:27:45.460" v="2068" actId="20577"/>
+        <pc:sldMkLst>
+          <pc:docMk/>
+          <pc:sldMk cId="4225163162" sldId="313"/>
+        </pc:sldMkLst>
+        <pc:spChg chg="mod">
+          <ac:chgData name="Gary Yu" userId="ff89ab59bb266fda" providerId="LiveId" clId="{D6D08EAD-FF1A-43AE-B251-67B60A84CA0E}" dt="2026-02-04T01:27:45.460" v="2068" actId="20577"/>
+          <ac:spMkLst>
+            <pc:docMk/>
+            <pc:sldMk cId="4225163162" sldId="313"/>
+            <ac:spMk id="2" creationId="{08595AE9-42C9-8BA7-40AF-204E1F9775B3}"/>
           </ac:spMkLst>
         </pc:spChg>
       </pc:sldChg>
@@ -8596,6 +8668,355 @@
           <p:cNvPr id="2" name="Title 1">
             <a:extLst>
               <a:ext uri="{FF2B5EF4-FFF2-40B4-BE49-F238E27FC236}">
+                <a16:creationId xmlns:a16="http://schemas.microsoft.com/office/drawing/2014/main" id="{08595AE9-42C9-8BA7-40AF-204E1F9775B3}"/>
+              </a:ext>
+            </a:extLst>
+          </p:cNvPr>
+          <p:cNvSpPr>
+            <a:spLocks noGrp="1"/>
+          </p:cNvSpPr>
+          <p:nvPr>
+            <p:ph type="title"/>
+          </p:nvPr>
+        </p:nvSpPr>
+        <p:spPr/>
+        <p:txBody>
+          <a:bodyPr>
+            <a:normAutofit/>
+          </a:bodyPr>
+          <a:lstStyle/>
+          <a:p>
+            <a:pPr algn="ctr"/>
+            <a:r>
+              <a:rPr lang="en-US" sz="5400" dirty="0" err="1"/>
+              <a:t>ArcPy</a:t>
+            </a:r>
+            <a:br>
+              <a:rPr lang="en-US" dirty="0"/>
+            </a:br>
+            <a:r>
+              <a:rPr lang="en-US" sz="1800" dirty="0"/>
+              <a:t>(“A Quick Tour of </a:t>
+            </a:r>
+            <a:r>
+              <a:rPr lang="en-US" sz="1800" dirty="0" err="1"/>
+              <a:t>ArcPy</a:t>
+            </a:r>
+            <a:r>
+              <a:rPr lang="en-US" sz="1800" dirty="0"/>
+              <a:t>—ArcGIS pro | Documentation”)</a:t>
+            </a:r>
+            <a:endParaRPr lang="en-US" dirty="0"/>
+          </a:p>
+        </p:txBody>
+      </p:sp>
+      <p:sp>
+        <p:nvSpPr>
+          <p:cNvPr id="3" name="Content Placeholder 2">
+            <a:extLst>
+              <a:ext uri="{FF2B5EF4-FFF2-40B4-BE49-F238E27FC236}">
+                <a16:creationId xmlns:a16="http://schemas.microsoft.com/office/drawing/2014/main" id="{04A86A2F-17FF-282B-3369-090DF3502244}"/>
+              </a:ext>
+            </a:extLst>
+          </p:cNvPr>
+          <p:cNvSpPr>
+            <a:spLocks noGrp="1"/>
+          </p:cNvSpPr>
+          <p:nvPr>
+            <p:ph idx="1"/>
+          </p:nvPr>
+        </p:nvSpPr>
+        <p:spPr/>
+        <p:txBody>
+          <a:bodyPr>
+            <a:normAutofit/>
+          </a:bodyPr>
+          <a:lstStyle/>
+          <a:p>
+            <a:pPr>
+              <a:buFont typeface="Arial" panose="020B0604020202020204" pitchFamily="34" charset="0"/>
+              <a:buChar char="•"/>
+            </a:pPr>
+            <a:r>
+              <a:rPr lang="en-US" dirty="0" err="1"/>
+              <a:t>ArcPy</a:t>
+            </a:r>
+            <a:r>
+              <a:rPr lang="en-US" dirty="0"/>
+              <a:t> is a Python site package that provides a useful and productive way to perform geographic data analysis, data conversion, data management, and map automation with Python.</a:t>
+            </a:r>
+          </a:p>
+          <a:p>
+            <a:pPr>
+              <a:buFont typeface="Arial" panose="020B0604020202020204" pitchFamily="34" charset="0"/>
+              <a:buChar char="•"/>
+            </a:pPr>
+            <a:r>
+              <a:rPr lang="en-US" dirty="0"/>
+              <a:t>This package provides a rich and native Python experience offering code completion (type a keyword and a dot to get a pop-up list of properties and methods supported by that keyword; select one to insert it) and reference documentation for each function, module, and class.</a:t>
+            </a:r>
+          </a:p>
+          <a:p>
+            <a:pPr>
+              <a:buFont typeface="Arial" panose="020B0604020202020204" pitchFamily="34" charset="0"/>
+              <a:buChar char="•"/>
+            </a:pPr>
+            <a:r>
+              <a:rPr lang="en-US" dirty="0"/>
+              <a:t>Only available with an ArcGIS Pro subscription. </a:t>
+            </a:r>
+          </a:p>
+          <a:p>
+            <a:r>
+              <a:rPr lang="en-US" dirty="0">
+                <a:hlinkClick r:id="rId2"/>
+              </a:rPr>
+              <a:t>Charts</a:t>
+            </a:r>
+            <a:r>
+              <a:rPr lang="en-US" dirty="0"/>
+              <a:t> (</a:t>
+            </a:r>
+            <a:r>
+              <a:rPr lang="en-US" dirty="0" err="1"/>
+              <a:t>arcpy.charts</a:t>
+            </a:r>
+            <a:r>
+              <a:rPr lang="en-US" dirty="0"/>
+              <a:t>) | </a:t>
+            </a:r>
+            <a:r>
+              <a:rPr lang="en-US" dirty="0">
+                <a:hlinkClick r:id="rId3"/>
+              </a:rPr>
+              <a:t>Data Access</a:t>
+            </a:r>
+            <a:r>
+              <a:rPr lang="en-US" dirty="0"/>
+              <a:t> (</a:t>
+            </a:r>
+            <a:r>
+              <a:rPr lang="en-US" dirty="0" err="1"/>
+              <a:t>arcpy.da</a:t>
+            </a:r>
+            <a:r>
+              <a:rPr lang="en-US" dirty="0"/>
+              <a:t>) | </a:t>
+            </a:r>
+            <a:r>
+              <a:rPr lang="en-US" dirty="0">
+                <a:hlinkClick r:id="rId4"/>
+              </a:rPr>
+              <a:t>Geocoding</a:t>
+            </a:r>
+            <a:r>
+              <a:rPr lang="en-US" dirty="0"/>
+              <a:t> (</a:t>
+            </a:r>
+            <a:r>
+              <a:rPr lang="en-US" dirty="0" err="1"/>
+              <a:t>arcpy.geocoding</a:t>
+            </a:r>
+            <a:r>
+              <a:rPr lang="en-US" dirty="0"/>
+              <a:t>) | </a:t>
+            </a:r>
+            <a:r>
+              <a:rPr lang="en-US" dirty="0">
+                <a:hlinkClick r:id="rId5"/>
+              </a:rPr>
+              <a:t>Image Analysis</a:t>
+            </a:r>
+            <a:r>
+              <a:rPr lang="en-US" dirty="0"/>
+              <a:t> (</a:t>
+            </a:r>
+            <a:r>
+              <a:rPr lang="en-US" dirty="0" err="1"/>
+              <a:t>arcpy.ia</a:t>
+            </a:r>
+            <a:r>
+              <a:rPr lang="en-US" dirty="0"/>
+              <a:t>) | </a:t>
+            </a:r>
+            <a:r>
+              <a:rPr lang="en-US" dirty="0">
+                <a:hlinkClick r:id="rId6"/>
+              </a:rPr>
+              <a:t>Mapping</a:t>
+            </a:r>
+            <a:r>
+              <a:rPr lang="en-US" dirty="0"/>
+              <a:t> (arcpy.mp)</a:t>
+            </a:r>
+          </a:p>
+          <a:p>
+            <a:r>
+              <a:rPr lang="en-US" dirty="0">
+                <a:hlinkClick r:id="rId7"/>
+              </a:rPr>
+              <a:t>Metadata</a:t>
+            </a:r>
+            <a:r>
+              <a:rPr lang="en-US" dirty="0"/>
+              <a:t> (</a:t>
+            </a:r>
+            <a:r>
+              <a:rPr lang="en-US" dirty="0" err="1"/>
+              <a:t>arcpy.metadata</a:t>
+            </a:r>
+            <a:r>
+              <a:rPr lang="en-US" dirty="0"/>
+              <a:t>) | </a:t>
+            </a:r>
+            <a:r>
+              <a:rPr lang="en-US" dirty="0">
+                <a:hlinkClick r:id="rId8"/>
+              </a:rPr>
+              <a:t>Network Analyst</a:t>
+            </a:r>
+            <a:r>
+              <a:rPr lang="en-US" dirty="0"/>
+              <a:t> (</a:t>
+            </a:r>
+            <a:r>
+              <a:rPr lang="en-US" dirty="0" err="1"/>
+              <a:t>arcpy.nax</a:t>
+            </a:r>
+            <a:r>
+              <a:rPr lang="en-US" dirty="0"/>
+              <a:t> and arcpy.na) | </a:t>
+            </a:r>
+            <a:r>
+              <a:rPr lang="en-US" dirty="0">
+                <a:hlinkClick r:id="rId9"/>
+              </a:rPr>
+              <a:t>Sharing</a:t>
+            </a:r>
+            <a:r>
+              <a:rPr lang="en-US" dirty="0"/>
+              <a:t> (</a:t>
+            </a:r>
+            <a:r>
+              <a:rPr lang="en-US" dirty="0" err="1"/>
+              <a:t>arcpy.sharing</a:t>
+            </a:r>
+            <a:r>
+              <a:rPr lang="en-US" dirty="0"/>
+              <a:t>)</a:t>
+            </a:r>
+          </a:p>
+          <a:p>
+            <a:r>
+              <a:rPr lang="en-US" dirty="0">
+                <a:hlinkClick r:id="rId10"/>
+              </a:rPr>
+              <a:t>Spatial Analyst</a:t>
+            </a:r>
+            <a:r>
+              <a:rPr lang="en-US" dirty="0"/>
+              <a:t> (arcpy.sa) | </a:t>
+            </a:r>
+            <a:r>
+              <a:rPr lang="en-US" dirty="0">
+                <a:hlinkClick r:id="rId11"/>
+              </a:rPr>
+              <a:t>Utility Network</a:t>
+            </a:r>
+            <a:r>
+              <a:rPr lang="en-US" dirty="0"/>
+              <a:t> (</a:t>
+            </a:r>
+            <a:r>
+              <a:rPr lang="en-US" dirty="0" err="1"/>
+              <a:t>arcpy.un</a:t>
+            </a:r>
+            <a:r>
+              <a:rPr lang="en-US"/>
+              <a:t>) | </a:t>
+            </a:r>
+            <a:r>
+              <a:rPr lang="en-US">
+                <a:hlinkClick r:id="rId12"/>
+              </a:rPr>
+              <a:t>Workflow </a:t>
+            </a:r>
+            <a:r>
+              <a:rPr lang="en-US" dirty="0">
+                <a:hlinkClick r:id="rId12"/>
+              </a:rPr>
+              <a:t>Manager</a:t>
+            </a:r>
+            <a:r>
+              <a:rPr lang="en-US" dirty="0"/>
+              <a:t> (</a:t>
+            </a:r>
+            <a:r>
+              <a:rPr lang="en-US" dirty="0" err="1"/>
+              <a:t>arcpy.wmx</a:t>
+            </a:r>
+            <a:r>
+              <a:rPr lang="en-US" dirty="0"/>
+              <a:t>)</a:t>
+            </a:r>
+          </a:p>
+          <a:p>
+            <a:pPr marL="0" indent="0">
+              <a:buNone/>
+            </a:pPr>
+            <a:endParaRPr lang="en-US" dirty="0"/>
+          </a:p>
+          <a:p>
+            <a:pPr>
+              <a:buFont typeface="Arial" panose="020B0604020202020204" pitchFamily="34" charset="0"/>
+              <a:buChar char="•"/>
+            </a:pPr>
+            <a:endParaRPr lang="en-US" dirty="0"/>
+          </a:p>
+          <a:p>
+            <a:pPr>
+              <a:buFont typeface="Arial" panose="020B0604020202020204" pitchFamily="34" charset="0"/>
+              <a:buChar char="•"/>
+            </a:pPr>
+            <a:endParaRPr lang="en-US" dirty="0"/>
+          </a:p>
+        </p:txBody>
+      </p:sp>
+    </p:spTree>
+    <p:extLst>
+      <p:ext uri="{BB962C8B-B14F-4D97-AF65-F5344CB8AC3E}">
+        <p14:creationId xmlns:p14="http://schemas.microsoft.com/office/powerpoint/2010/main" val="4225163162"/>
+      </p:ext>
+    </p:extLst>
+  </p:cSld>
+  <p:clrMapOvr>
+    <a:masterClrMapping/>
+  </p:clrMapOvr>
+</p:sld>
+</file>
+
+<file path=ppt/slides/slide11.xml><?xml version="1.0" encoding="utf-8"?>
+<p:sld xmlns:a="http://schemas.openxmlformats.org/drawingml/2006/main" xmlns:r="http://schemas.openxmlformats.org/officeDocument/2006/relationships" xmlns:p="http://schemas.openxmlformats.org/presentationml/2006/main">
+  <p:cSld>
+    <p:spTree>
+      <p:nvGrpSpPr>
+        <p:cNvPr id="1" name=""/>
+        <p:cNvGrpSpPr/>
+        <p:nvPr/>
+      </p:nvGrpSpPr>
+      <p:grpSpPr>
+        <a:xfrm>
+          <a:off x="0" y="0"/>
+          <a:ext cx="0" cy="0"/>
+          <a:chOff x="0" y="0"/>
+          <a:chExt cx="0" cy="0"/>
+        </a:xfrm>
+      </p:grpSpPr>
+      <p:sp>
+        <p:nvSpPr>
+          <p:cNvPr id="2" name="Title 1">
+            <a:extLst>
+              <a:ext uri="{FF2B5EF4-FFF2-40B4-BE49-F238E27FC236}">
                 <a16:creationId xmlns:a16="http://schemas.microsoft.com/office/drawing/2014/main" id="{4D1480E3-ED2D-9E23-0D93-684042548876}"/>
               </a:ext>
             </a:extLst>
@@ -8744,7 +9165,7 @@
 </p:sld>
 </file>
 
-<file path=ppt/slides/slide11.xml><?xml version="1.0" encoding="utf-8"?>
+<file path=ppt/slides/slide12.xml><?xml version="1.0" encoding="utf-8"?>
 <p:sld xmlns:a="http://schemas.openxmlformats.org/drawingml/2006/main" xmlns:r="http://schemas.openxmlformats.org/officeDocument/2006/relationships" xmlns:p="http://schemas.openxmlformats.org/presentationml/2006/main">
   <p:cSld>
     <p:spTree>
@@ -8874,7 +9295,7 @@
 </p:sld>
 </file>
 
-<file path=ppt/slides/slide12.xml><?xml version="1.0" encoding="utf-8"?>
+<file path=ppt/slides/slide13.xml><?xml version="1.0" encoding="utf-8"?>
 <p:sld xmlns:a="http://schemas.openxmlformats.org/drawingml/2006/main" xmlns:r="http://schemas.openxmlformats.org/officeDocument/2006/relationships" xmlns:p="http://schemas.openxmlformats.org/presentationml/2006/main">
   <p:cSld>
     <p:spTree>
@@ -9041,7 +9462,7 @@
 </p:sld>
 </file>
 
-<file path=ppt/slides/slide13.xml><?xml version="1.0" encoding="utf-8"?>
+<file path=ppt/slides/slide14.xml><?xml version="1.0" encoding="utf-8"?>
 <p:sld xmlns:a="http://schemas.openxmlformats.org/drawingml/2006/main" xmlns:r="http://schemas.openxmlformats.org/officeDocument/2006/relationships" xmlns:p="http://schemas.openxmlformats.org/presentationml/2006/main">
   <p:cSld>
     <p:spTree>
@@ -9133,7 +9554,7 @@
 </p:sld>
 </file>
 
-<file path=ppt/slides/slide14.xml><?xml version="1.0" encoding="utf-8"?>
+<file path=ppt/slides/slide15.xml><?xml version="1.0" encoding="utf-8"?>
 <p:sld xmlns:a="http://schemas.openxmlformats.org/drawingml/2006/main" xmlns:r="http://schemas.openxmlformats.org/officeDocument/2006/relationships" xmlns:p="http://schemas.openxmlformats.org/presentationml/2006/main">
   <p:cSld>
     <p:spTree>
@@ -9233,7 +9654,7 @@
 </p:sld>
 </file>
 
-<file path=ppt/slides/slide15.xml><?xml version="1.0" encoding="utf-8"?>
+<file path=ppt/slides/slide16.xml><?xml version="1.0" encoding="utf-8"?>
 <p:sld xmlns:a="http://schemas.openxmlformats.org/drawingml/2006/main" xmlns:r="http://schemas.openxmlformats.org/officeDocument/2006/relationships" xmlns:p="http://schemas.openxmlformats.org/presentationml/2006/main">
   <p:cSld>
     <p:spTree>
@@ -9325,7 +9746,7 @@
 </p:sld>
 </file>
 
-<file path=ppt/slides/slide16.xml><?xml version="1.0" encoding="utf-8"?>
+<file path=ppt/slides/slide17.xml><?xml version="1.0" encoding="utf-8"?>
 <p:sld xmlns:a="http://schemas.openxmlformats.org/drawingml/2006/main" xmlns:r="http://schemas.openxmlformats.org/officeDocument/2006/relationships" xmlns:p="http://schemas.openxmlformats.org/presentationml/2006/main">
   <p:cSld>
     <p:spTree>
@@ -9417,7 +9838,7 @@
 </p:sld>
 </file>
 
-<file path=ppt/slides/slide17.xml><?xml version="1.0" encoding="utf-8"?>
+<file path=ppt/slides/slide18.xml><?xml version="1.0" encoding="utf-8"?>
 <p:sld xmlns:a="http://schemas.openxmlformats.org/drawingml/2006/main" xmlns:r="http://schemas.openxmlformats.org/officeDocument/2006/relationships" xmlns:p="http://schemas.openxmlformats.org/presentationml/2006/main">
   <p:cSld>
     <p:spTree>
@@ -9457,8 +9878,12 @@
           <a:p>
             <a:pPr algn="ctr"/>
             <a:r>
+              <a:rPr lang="en-US"/>
+              <a:t>Works </a:t>
+            </a:r>
+            <a:r>
               <a:rPr lang="en-US" dirty="0"/>
-              <a:t>Works Cited</a:t>
+              <a:t>Cited</a:t>
             </a:r>
           </a:p>
         </p:txBody>
@@ -9556,6 +9981,36 @@
             </a:r>
           </a:p>
           <a:p>
+            <a:r>
+              <a:rPr lang="en-US" dirty="0"/>
+              <a:t>“A Quick Tour of </a:t>
+            </a:r>
+            <a:r>
+              <a:rPr lang="en-US" dirty="0" err="1"/>
+              <a:t>ArcPy</a:t>
+            </a:r>
+            <a:r>
+              <a:rPr lang="en-US" dirty="0"/>
+              <a:t>—ArcGIS pro | Documentation.” Arcgis.com, 2026, pro.arcgis.com/</a:t>
+            </a:r>
+            <a:r>
+              <a:rPr lang="en-US" dirty="0" err="1"/>
+              <a:t>en</a:t>
+            </a:r>
+            <a:r>
+              <a:rPr lang="en-US" dirty="0"/>
+              <a:t>/pro-app/3.4/</a:t>
+            </a:r>
+            <a:r>
+              <a:rPr lang="en-US" dirty="0" err="1"/>
+              <a:t>arcpy</a:t>
+            </a:r>
+            <a:r>
+              <a:rPr lang="en-US" dirty="0"/>
+              <a:t>/get-started/a-quick-tour-of-arcpy.htm. Accessed 4 Feb. 2026.</a:t>
+            </a:r>
+          </a:p>
+          <a:p>
             <a:pPr marL="0" indent="0">
               <a:buNone/>
             </a:pPr>
@@ -9570,6 +10025,90 @@
     <p:extLst>
       <p:ext uri="{BB962C8B-B14F-4D97-AF65-F5344CB8AC3E}">
         <p14:creationId xmlns:p14="http://schemas.microsoft.com/office/powerpoint/2010/main" val="1928736779"/>
+      </p:ext>
+    </p:extLst>
+  </p:cSld>
+  <p:clrMapOvr>
+    <a:masterClrMapping/>
+  </p:clrMapOvr>
+</p:sld>
+</file>
+
+<file path=ppt/slides/slide19.xml><?xml version="1.0" encoding="utf-8"?>
+<p:sld xmlns:a="http://schemas.openxmlformats.org/drawingml/2006/main" xmlns:r="http://schemas.openxmlformats.org/officeDocument/2006/relationships" xmlns:p="http://schemas.openxmlformats.org/presentationml/2006/main">
+  <p:cSld>
+    <p:spTree>
+      <p:nvGrpSpPr>
+        <p:cNvPr id="1" name=""/>
+        <p:cNvGrpSpPr/>
+        <p:nvPr/>
+      </p:nvGrpSpPr>
+      <p:grpSpPr>
+        <a:xfrm>
+          <a:off x="0" y="0"/>
+          <a:ext cx="0" cy="0"/>
+          <a:chOff x="0" y="0"/>
+          <a:chExt cx="0" cy="0"/>
+        </a:xfrm>
+      </p:grpSpPr>
+      <p:sp>
+        <p:nvSpPr>
+          <p:cNvPr id="2" name="Title 1">
+            <a:extLst>
+              <a:ext uri="{FF2B5EF4-FFF2-40B4-BE49-F238E27FC236}">
+                <a16:creationId xmlns:a16="http://schemas.microsoft.com/office/drawing/2014/main" id="{8F844800-A461-BA96-8402-3906A7D1CD4B}"/>
+              </a:ext>
+            </a:extLst>
+          </p:cNvPr>
+          <p:cNvSpPr>
+            <a:spLocks noGrp="1"/>
+          </p:cNvSpPr>
+          <p:nvPr>
+            <p:ph type="title"/>
+          </p:nvPr>
+        </p:nvSpPr>
+        <p:spPr/>
+        <p:txBody>
+          <a:bodyPr/>
+          <a:lstStyle/>
+          <a:p>
+            <a:pPr algn="ctr"/>
+            <a:r>
+              <a:rPr lang="en-US" dirty="0"/>
+              <a:t>Questions?</a:t>
+            </a:r>
+          </a:p>
+        </p:txBody>
+      </p:sp>
+      <p:sp>
+        <p:nvSpPr>
+          <p:cNvPr id="3" name="Content Placeholder 2">
+            <a:extLst>
+              <a:ext uri="{FF2B5EF4-FFF2-40B4-BE49-F238E27FC236}">
+                <a16:creationId xmlns:a16="http://schemas.microsoft.com/office/drawing/2014/main" id="{17928A93-66F7-84CF-B306-E8D25EA47079}"/>
+              </a:ext>
+            </a:extLst>
+          </p:cNvPr>
+          <p:cNvSpPr>
+            <a:spLocks noGrp="1"/>
+          </p:cNvSpPr>
+          <p:nvPr>
+            <p:ph idx="1"/>
+          </p:nvPr>
+        </p:nvSpPr>
+        <p:spPr/>
+        <p:txBody>
+          <a:bodyPr/>
+          <a:lstStyle/>
+          <a:p>
+            <a:endParaRPr lang="en-US"/>
+          </a:p>
+        </p:txBody>
+      </p:sp>
+    </p:spTree>
+    <p:extLst>
+      <p:ext uri="{BB962C8B-B14F-4D97-AF65-F5344CB8AC3E}">
+        <p14:creationId xmlns:p14="http://schemas.microsoft.com/office/powerpoint/2010/main" val="376323715"/>
       </p:ext>
     </p:extLst>
   </p:cSld>
